--- a/Incremento 1/Grupo 24 -Presentación incremento 1 Ingenieria de Software 1.pptx
+++ b/Incremento 1/Grupo 24 -Presentación incremento 1 Ingenieria de Software 1.pptx
@@ -303,7 +303,7 @@
       </p15:sldGuideLst>
     </p:ext>
     <p:ext uri="GoogleSlidesCustomDataVersion2">
-      <go:slidesCustomData xmlns:go="http://customooxmlschemas.google.com/" r:id="rId39" roundtripDataSignature="AMtx7miS9MdtJOdn80sxx0B38rRuvVzyhA=="/>
+      <go:slidesCustomData xmlns:go="http://customooxmlschemas.google.com/" r:id="rId39" roundtripDataSignature="AMtx7mjJdThujy5AQmuZTwQ1ytTH7oaGWw=="/>
     </p:ext>
   </p:extLst>
 </p:presentation>
@@ -23132,7 +23132,7 @@
         <p:spPr>
           <a:xfrm>
             <a:off x="689675" y="2882028"/>
-            <a:ext cx="5947612" cy="972800"/>
+            <a:ext cx="5947500" cy="939900"/>
           </a:xfrm>
           <a:prstGeom prst="rect">
             <a:avLst/>
@@ -23175,7 +23175,28 @@
                 <a:cs typeface="Calibri"/>
                 <a:sym typeface="Calibri"/>
               </a:rPr>
-              <a:t>CU01: Acceso con usuario y contraseña única.</a:t>
+              <a:t>CU01: Acce</a:t>
+            </a:r>
+            <a:r>
+              <a:rPr b="1" lang="en-US" sz="2337">
+                <a:latin typeface="Calibri"/>
+                <a:ea typeface="Calibri"/>
+                <a:cs typeface="Calibri"/>
+                <a:sym typeface="Calibri"/>
+              </a:rPr>
+              <a:t>diendo</a:t>
+            </a:r>
+            <a:r>
+              <a:rPr b="1" i="0" lang="en-US" sz="2337" u="none" cap="none" strike="noStrike">
+                <a:solidFill>
+                  <a:srgbClr val="000000"/>
+                </a:solidFill>
+                <a:latin typeface="Calibri"/>
+                <a:ea typeface="Calibri"/>
+                <a:cs typeface="Calibri"/>
+                <a:sym typeface="Calibri"/>
+              </a:rPr>
+              <a:t> con usuario y contraseña única.</a:t>
             </a:r>
             <a:endParaRPr/>
           </a:p>
@@ -23190,7 +23211,7 @@
         <p:spPr>
           <a:xfrm>
             <a:off x="689675" y="3832385"/>
-            <a:ext cx="5947612" cy="972800"/>
+            <a:ext cx="5947500" cy="939900"/>
           </a:xfrm>
           <a:prstGeom prst="rect">
             <a:avLst/>
@@ -23233,7 +23254,28 @@
                 <a:cs typeface="Calibri"/>
                 <a:sym typeface="Calibri"/>
               </a:rPr>
-              <a:t>CU02: Roles definidos (Chofer, Jefe de Bodega, Administrador).</a:t>
+              <a:t>CU02: </a:t>
+            </a:r>
+            <a:r>
+              <a:rPr b="1" lang="en-US" sz="2337">
+                <a:latin typeface="Calibri"/>
+                <a:ea typeface="Calibri"/>
+                <a:cs typeface="Calibri"/>
+                <a:sym typeface="Calibri"/>
+              </a:rPr>
+              <a:t>definiendo roles</a:t>
+            </a:r>
+            <a:r>
+              <a:rPr b="1" i="0" lang="en-US" sz="2337" u="none" cap="none" strike="noStrike">
+                <a:solidFill>
+                  <a:srgbClr val="000000"/>
+                </a:solidFill>
+                <a:latin typeface="Calibri"/>
+                <a:ea typeface="Calibri"/>
+                <a:cs typeface="Calibri"/>
+                <a:sym typeface="Calibri"/>
+              </a:rPr>
+              <a:t> (Chofer, Jefe de Bodega, Administrador).</a:t>
             </a:r>
             <a:endParaRPr/>
           </a:p>
@@ -23248,7 +23290,7 @@
         <p:spPr>
           <a:xfrm>
             <a:off x="689675" y="4881385"/>
-            <a:ext cx="5947612" cy="496550"/>
+            <a:ext cx="5947500" cy="359700"/>
           </a:xfrm>
           <a:prstGeom prst="rect">
             <a:avLst/>
@@ -23291,7 +23333,28 @@
                 <a:cs typeface="Calibri"/>
                 <a:sym typeface="Calibri"/>
               </a:rPr>
-              <a:t>CU03: Asignación de permisos por módulo.</a:t>
+              <a:t>CU03: Asigna</a:t>
+            </a:r>
+            <a:r>
+              <a:rPr b="1" lang="en-US" sz="2337">
+                <a:latin typeface="Calibri"/>
+                <a:ea typeface="Calibri"/>
+                <a:cs typeface="Calibri"/>
+                <a:sym typeface="Calibri"/>
+              </a:rPr>
+              <a:t>ndo</a:t>
+            </a:r>
+            <a:r>
+              <a:rPr b="1" i="0" lang="en-US" sz="2337" u="none" cap="none" strike="noStrike">
+                <a:solidFill>
+                  <a:srgbClr val="000000"/>
+                </a:solidFill>
+                <a:latin typeface="Calibri"/>
+                <a:ea typeface="Calibri"/>
+                <a:cs typeface="Calibri"/>
+                <a:sym typeface="Calibri"/>
+              </a:rPr>
+              <a:t> permisos por módulo.</a:t>
             </a:r>
             <a:endParaRPr/>
           </a:p>
@@ -23306,7 +23369,7 @@
         <p:spPr>
           <a:xfrm>
             <a:off x="689675" y="5523876"/>
-            <a:ext cx="5947612" cy="972800"/>
+            <a:ext cx="5947500" cy="359700"/>
           </a:xfrm>
           <a:prstGeom prst="rect">
             <a:avLst/>
@@ -23349,7 +23412,28 @@
                 <a:cs typeface="Calibri"/>
                 <a:sym typeface="Calibri"/>
               </a:rPr>
-              <a:t>CU04: Recuperación de contraseñas por correo.</a:t>
+              <a:t>CU04: Recuper</a:t>
+            </a:r>
+            <a:r>
+              <a:rPr b="1" lang="en-US" sz="2337">
+                <a:latin typeface="Calibri"/>
+                <a:ea typeface="Calibri"/>
+                <a:cs typeface="Calibri"/>
+                <a:sym typeface="Calibri"/>
+              </a:rPr>
+              <a:t>ando</a:t>
+            </a:r>
+            <a:r>
+              <a:rPr b="1" i="0" lang="en-US" sz="2337" u="none" cap="none" strike="noStrike">
+                <a:solidFill>
+                  <a:srgbClr val="000000"/>
+                </a:solidFill>
+                <a:latin typeface="Calibri"/>
+                <a:ea typeface="Calibri"/>
+                <a:cs typeface="Calibri"/>
+                <a:sym typeface="Calibri"/>
+              </a:rPr>
+              <a:t> contraseñas por correo.</a:t>
             </a:r>
             <a:endParaRPr/>
           </a:p>
@@ -23364,7 +23448,7 @@
         <p:spPr>
           <a:xfrm>
             <a:off x="689675" y="6572876"/>
-            <a:ext cx="5947612" cy="972800"/>
+            <a:ext cx="5947500" cy="939900"/>
           </a:xfrm>
           <a:prstGeom prst="rect">
             <a:avLst/>
@@ -23407,7 +23491,49 @@
                 <a:cs typeface="Calibri"/>
                 <a:sym typeface="Calibri"/>
               </a:rPr>
-              <a:t>CU05: Cierre automático de sesión por inactividad (10 min).</a:t>
+              <a:t>CU05: C</a:t>
+            </a:r>
+            <a:r>
+              <a:rPr b="1" lang="en-US" sz="2337">
+                <a:latin typeface="Calibri"/>
+                <a:ea typeface="Calibri"/>
+                <a:cs typeface="Calibri"/>
+                <a:sym typeface="Calibri"/>
+              </a:rPr>
+              <a:t>errando</a:t>
+            </a:r>
+            <a:r>
+              <a:rPr b="1" i="0" lang="en-US" sz="2337" u="none" cap="none" strike="noStrike">
+                <a:solidFill>
+                  <a:srgbClr val="000000"/>
+                </a:solidFill>
+                <a:latin typeface="Calibri"/>
+                <a:ea typeface="Calibri"/>
+                <a:cs typeface="Calibri"/>
+                <a:sym typeface="Calibri"/>
+              </a:rPr>
+              <a:t> automáti</a:t>
+            </a:r>
+            <a:r>
+              <a:rPr b="1" lang="en-US" sz="2337">
+                <a:latin typeface="Calibri"/>
+                <a:ea typeface="Calibri"/>
+                <a:cs typeface="Calibri"/>
+                <a:sym typeface="Calibri"/>
+              </a:rPr>
+              <a:t>camente</a:t>
+            </a:r>
+            <a:r>
+              <a:rPr b="1" i="0" lang="en-US" sz="2337" u="none" cap="none" strike="noStrike">
+                <a:solidFill>
+                  <a:srgbClr val="000000"/>
+                </a:solidFill>
+                <a:latin typeface="Calibri"/>
+                <a:ea typeface="Calibri"/>
+                <a:cs typeface="Calibri"/>
+                <a:sym typeface="Calibri"/>
+              </a:rPr>
+              <a:t> de sesión por inactividad (10 min).</a:t>
             </a:r>
             <a:endParaRPr/>
           </a:p>
@@ -23422,7 +23548,7 @@
         <p:spPr>
           <a:xfrm>
             <a:off x="6766415" y="2882028"/>
-            <a:ext cx="5335653" cy="972801"/>
+            <a:ext cx="5335800" cy="939900"/>
           </a:xfrm>
           <a:prstGeom prst="rect">
             <a:avLst/>
@@ -23465,7 +23591,28 @@
                 <a:cs typeface="Calibri"/>
                 <a:sym typeface="Calibri"/>
               </a:rPr>
-              <a:t>CU06: Registro de cilindros nuevos (fecha, tipo, cantidad).</a:t>
+              <a:t>CU06: Registr</a:t>
+            </a:r>
+            <a:r>
+              <a:rPr b="1" lang="en-US" sz="2337">
+                <a:latin typeface="Calibri"/>
+                <a:ea typeface="Calibri"/>
+                <a:cs typeface="Calibri"/>
+                <a:sym typeface="Calibri"/>
+              </a:rPr>
+              <a:t>ando </a:t>
+            </a:r>
+            <a:r>
+              <a:rPr b="1" i="0" lang="en-US" sz="2337" u="none" cap="none" strike="noStrike">
+                <a:solidFill>
+                  <a:srgbClr val="000000"/>
+                </a:solidFill>
+                <a:latin typeface="Calibri"/>
+                <a:ea typeface="Calibri"/>
+                <a:cs typeface="Calibri"/>
+                <a:sym typeface="Calibri"/>
+              </a:rPr>
+              <a:t>cilindros nuevos (fecha, tipo, cantidad).</a:t>
             </a:r>
             <a:endParaRPr/>
           </a:p>
@@ -23480,7 +23627,7 @@
         <p:spPr>
           <a:xfrm>
             <a:off x="6766415" y="4105213"/>
-            <a:ext cx="5335653" cy="972801"/>
+            <a:ext cx="5335800" cy="939900"/>
           </a:xfrm>
           <a:prstGeom prst="rect">
             <a:avLst/>
@@ -23523,7 +23670,28 @@
                 <a:cs typeface="Calibri"/>
                 <a:sym typeface="Calibri"/>
               </a:rPr>
-              <a:t>CU07: Validación automática de formatos.</a:t>
+              <a:t>CU07: Valida</a:t>
+            </a:r>
+            <a:r>
+              <a:rPr b="1" lang="en-US" sz="2337">
+                <a:latin typeface="Calibri"/>
+                <a:ea typeface="Calibri"/>
+                <a:cs typeface="Calibri"/>
+                <a:sym typeface="Calibri"/>
+              </a:rPr>
+              <a:t>ndo</a:t>
+            </a:r>
+            <a:r>
+              <a:rPr b="1" i="0" lang="en-US" sz="2337" u="none" cap="none" strike="noStrike">
+                <a:solidFill>
+                  <a:srgbClr val="000000"/>
+                </a:solidFill>
+                <a:latin typeface="Calibri"/>
+                <a:ea typeface="Calibri"/>
+                <a:cs typeface="Calibri"/>
+                <a:sym typeface="Calibri"/>
+              </a:rPr>
+              <a:t> automáticamente de formatos.</a:t>
             </a:r>
             <a:endParaRPr/>
           </a:p>
@@ -23538,7 +23706,7 @@
         <p:spPr>
           <a:xfrm>
             <a:off x="6766415" y="5177573"/>
-            <a:ext cx="5335653" cy="972801"/>
+            <a:ext cx="5335800" cy="939900"/>
           </a:xfrm>
           <a:prstGeom prst="rect">
             <a:avLst/>
@@ -23581,7 +23749,28 @@
                 <a:cs typeface="Calibri"/>
                 <a:sym typeface="Calibri"/>
               </a:rPr>
-              <a:t>CU08: Edición de estado de cilindro (lleno/vacío).</a:t>
+              <a:t>CU08: Edi</a:t>
+            </a:r>
+            <a:r>
+              <a:rPr b="1" lang="en-US" sz="2337">
+                <a:latin typeface="Calibri"/>
+                <a:ea typeface="Calibri"/>
+                <a:cs typeface="Calibri"/>
+                <a:sym typeface="Calibri"/>
+              </a:rPr>
+              <a:t>tando</a:t>
+            </a:r>
+            <a:r>
+              <a:rPr b="1" i="0" lang="en-US" sz="2337" u="none" cap="none" strike="noStrike">
+                <a:solidFill>
+                  <a:srgbClr val="000000"/>
+                </a:solidFill>
+                <a:latin typeface="Calibri"/>
+                <a:ea typeface="Calibri"/>
+                <a:cs typeface="Calibri"/>
+                <a:sym typeface="Calibri"/>
+              </a:rPr>
+              <a:t> estado de cilindro (lleno/vacío).</a:t>
             </a:r>
             <a:endParaRPr/>
           </a:p>
@@ -23596,7 +23785,7 @@
         <p:spPr>
           <a:xfrm>
             <a:off x="6766415" y="6147557"/>
-            <a:ext cx="5335653" cy="972801"/>
+            <a:ext cx="5335800" cy="939900"/>
           </a:xfrm>
           <a:prstGeom prst="rect">
             <a:avLst/>
@@ -23639,7 +23828,28 @@
                 <a:cs typeface="Calibri"/>
                 <a:sym typeface="Calibri"/>
               </a:rPr>
-              <a:t>CU09: Búsqueda de cilindros por tipo y estado.</a:t>
+              <a:t>CU09: </a:t>
+            </a:r>
+            <a:r>
+              <a:rPr b="1" lang="en-US" sz="2337">
+                <a:latin typeface="Calibri"/>
+                <a:ea typeface="Calibri"/>
+                <a:cs typeface="Calibri"/>
+                <a:sym typeface="Calibri"/>
+              </a:rPr>
+              <a:t>filtrando</a:t>
+            </a:r>
+            <a:r>
+              <a:rPr b="1" i="0" lang="en-US" sz="2337" u="none" cap="none" strike="noStrike">
+                <a:solidFill>
+                  <a:srgbClr val="000000"/>
+                </a:solidFill>
+                <a:latin typeface="Calibri"/>
+                <a:ea typeface="Calibri"/>
+                <a:cs typeface="Calibri"/>
+                <a:sym typeface="Calibri"/>
+              </a:rPr>
+              <a:t> cilindros por tipo y estado.</a:t>
             </a:r>
             <a:endParaRPr/>
           </a:p>
@@ -23654,7 +23864,7 @@
         <p:spPr>
           <a:xfrm>
             <a:off x="6766415" y="7098490"/>
-            <a:ext cx="5335653" cy="972801"/>
+            <a:ext cx="5335800" cy="939900"/>
           </a:xfrm>
           <a:prstGeom prst="rect">
             <a:avLst/>
@@ -23697,7 +23907,28 @@
                 <a:cs typeface="Calibri"/>
                 <a:sym typeface="Calibri"/>
               </a:rPr>
-              <a:t>CU10: Alerta automática por stock mínimo.</a:t>
+              <a:t>CU10: </a:t>
+            </a:r>
+            <a:r>
+              <a:rPr b="1" lang="en-US" sz="2337">
+                <a:latin typeface="Calibri"/>
+                <a:ea typeface="Calibri"/>
+                <a:cs typeface="Calibri"/>
+                <a:sym typeface="Calibri"/>
+              </a:rPr>
+              <a:t>Generando a</a:t>
+            </a:r>
+            <a:r>
+              <a:rPr b="1" i="0" lang="en-US" sz="2337" u="none" cap="none" strike="noStrike">
+                <a:solidFill>
+                  <a:srgbClr val="000000"/>
+                </a:solidFill>
+                <a:latin typeface="Calibri"/>
+                <a:ea typeface="Calibri"/>
+                <a:cs typeface="Calibri"/>
+                <a:sym typeface="Calibri"/>
+              </a:rPr>
+              <a:t>lerta automática por stock mínimo.</a:t>
             </a:r>
             <a:endParaRPr/>
           </a:p>
@@ -23712,7 +23943,7 @@
         <p:spPr>
           <a:xfrm>
             <a:off x="6766415" y="8173249"/>
-            <a:ext cx="5335653" cy="496551"/>
+            <a:ext cx="5335800" cy="359700"/>
           </a:xfrm>
           <a:prstGeom prst="rect">
             <a:avLst/>
@@ -23755,7 +23986,28 @@
                 <a:cs typeface="Calibri"/>
                 <a:sym typeface="Calibri"/>
               </a:rPr>
-              <a:t>CU11: Registro de pérdidas o daños.</a:t>
+              <a:t>CU11: Registr</a:t>
+            </a:r>
+            <a:r>
+              <a:rPr b="1" lang="en-US" sz="2337">
+                <a:latin typeface="Calibri"/>
+                <a:ea typeface="Calibri"/>
+                <a:cs typeface="Calibri"/>
+                <a:sym typeface="Calibri"/>
+              </a:rPr>
+              <a:t>ando </a:t>
+            </a:r>
+            <a:r>
+              <a:rPr b="1" i="0" lang="en-US" sz="2337" u="none" cap="none" strike="noStrike">
+                <a:solidFill>
+                  <a:srgbClr val="000000"/>
+                </a:solidFill>
+                <a:latin typeface="Calibri"/>
+                <a:ea typeface="Calibri"/>
+                <a:cs typeface="Calibri"/>
+                <a:sym typeface="Calibri"/>
+              </a:rPr>
+              <a:t> pérdidas o daños.</a:t>
             </a:r>
             <a:endParaRPr/>
           </a:p>
@@ -23770,7 +24022,7 @@
         <p:spPr>
           <a:xfrm>
             <a:off x="12770385" y="2809800"/>
-            <a:ext cx="5030391" cy="972801"/>
+            <a:ext cx="5030400" cy="939900"/>
           </a:xfrm>
           <a:prstGeom prst="rect">
             <a:avLst/>
@@ -23813,7 +24065,28 @@
                 <a:cs typeface="Calibri"/>
                 <a:sym typeface="Calibri"/>
               </a:rPr>
-              <a:t>CU12: Generación de informe diario de stock.</a:t>
+              <a:t>CU12: Genera</a:t>
+            </a:r>
+            <a:r>
+              <a:rPr b="1" lang="en-US" sz="2337">
+                <a:latin typeface="Calibri"/>
+                <a:ea typeface="Calibri"/>
+                <a:cs typeface="Calibri"/>
+                <a:sym typeface="Calibri"/>
+              </a:rPr>
+              <a:t>ndo</a:t>
+            </a:r>
+            <a:r>
+              <a:rPr b="1" i="0" lang="en-US" sz="2337" u="none" cap="none" strike="noStrike">
+                <a:solidFill>
+                  <a:srgbClr val="000000"/>
+                </a:solidFill>
+                <a:latin typeface="Calibri"/>
+                <a:ea typeface="Calibri"/>
+                <a:cs typeface="Calibri"/>
+                <a:sym typeface="Calibri"/>
+              </a:rPr>
+              <a:t>  informe diario de stock.</a:t>
             </a:r>
             <a:endParaRPr/>
           </a:p>
@@ -23828,7 +24101,7 @@
         <p:spPr>
           <a:xfrm>
             <a:off x="12770385" y="4051459"/>
-            <a:ext cx="5030391" cy="972801"/>
+            <a:ext cx="5030400" cy="939900"/>
           </a:xfrm>
           <a:prstGeom prst="rect">
             <a:avLst/>
@@ -23871,7 +24144,28 @@
                 <a:cs typeface="Calibri"/>
                 <a:sym typeface="Calibri"/>
               </a:rPr>
-              <a:t>CU13: Consulta de historial de cambios en inventario.</a:t>
+              <a:t>CU13: Consultando </a:t>
+            </a:r>
+            <a:r>
+              <a:rPr b="1" lang="en-US" sz="2337">
+                <a:latin typeface="Calibri"/>
+                <a:ea typeface="Calibri"/>
+                <a:cs typeface="Calibri"/>
+                <a:sym typeface="Calibri"/>
+              </a:rPr>
+              <a:t>el</a:t>
+            </a:r>
+            <a:r>
+              <a:rPr b="1" i="0" lang="en-US" sz="2337" u="none" cap="none" strike="noStrike">
+                <a:solidFill>
+                  <a:srgbClr val="000000"/>
+                </a:solidFill>
+                <a:latin typeface="Calibri"/>
+                <a:ea typeface="Calibri"/>
+                <a:cs typeface="Calibri"/>
+                <a:sym typeface="Calibri"/>
+              </a:rPr>
+              <a:t> historial de cambios en inventario.</a:t>
             </a:r>
             <a:endParaRPr/>
           </a:p>
@@ -24778,30 +25072,30 @@
       </p:grpSpPr>
       <p:sp>
         <p:nvSpPr>
-          <p:cNvPr descr="preencoded.png" id="202" name="Google Shape;202;p8"/>
+          <p:cNvPr id="202" name="Google Shape;202;p8"/>
           <p:cNvSpPr/>
           <p:nvPr/>
         </p:nvSpPr>
         <p:spPr>
           <a:xfrm>
-            <a:off x="598885" y="1463246"/>
-            <a:ext cx="8367407" cy="8553158"/>
+            <a:off x="0" y="0"/>
+            <a:ext cx="18287988" cy="1204341"/>
           </a:xfrm>
           <a:custGeom>
             <a:rect b="b" l="l" r="r" t="t"/>
             <a:pathLst>
-              <a:path extrusionOk="0" h="11397488" w="11149965">
+              <a:path extrusionOk="0" h="1605788" w="24383984">
                 <a:moveTo>
                   <a:pt x="0" y="0"/>
                 </a:moveTo>
                 <a:lnTo>
-                  <a:pt x="11149965" y="0"/>
-                </a:lnTo>
-                <a:lnTo>
-                  <a:pt x="11149965" y="11397488"/>
-                </a:lnTo>
-                <a:lnTo>
-                  <a:pt x="0" y="11397488"/>
+                  <a:pt x="24383984" y="0"/>
+                </a:lnTo>
+                <a:lnTo>
+                  <a:pt x="24383984" y="1605788"/>
+                </a:lnTo>
+                <a:lnTo>
+                  <a:pt x="0" y="1605788"/>
                 </a:lnTo>
                 <a:lnTo>
                   <a:pt x="0" y="0"/>
@@ -24815,7 +25109,7 @@
               <a:alphaModFix/>
             </a:blip>
             <a:stretch>
-              <a:fillRect b="0" l="-26" r="-25" t="0"/>
+              <a:fillRect b="-188960" l="0" r="0" t="-188960"/>
             </a:stretch>
           </a:blipFill>
           <a:ln>
@@ -24831,24 +25125,24 @@
         </p:nvSpPr>
         <p:spPr>
           <a:xfrm>
-            <a:off x="0" y="0"/>
-            <a:ext cx="18287988" cy="1204341"/>
+            <a:off x="17050470" y="98373"/>
+            <a:ext cx="1078897" cy="900017"/>
           </a:xfrm>
           <a:custGeom>
             <a:rect b="b" l="l" r="r" t="t"/>
             <a:pathLst>
-              <a:path extrusionOk="0" h="1605788" w="24383984">
+              <a:path extrusionOk="0" h="1200023" w="1438529">
                 <a:moveTo>
                   <a:pt x="0" y="0"/>
                 </a:moveTo>
                 <a:lnTo>
-                  <a:pt x="24383984" y="0"/>
-                </a:lnTo>
-                <a:lnTo>
-                  <a:pt x="24383984" y="1605788"/>
-                </a:lnTo>
-                <a:lnTo>
-                  <a:pt x="0" y="1605788"/>
+                  <a:pt x="1438529" y="0"/>
+                </a:lnTo>
+                <a:lnTo>
+                  <a:pt x="1438529" y="1200023"/>
+                </a:lnTo>
+                <a:lnTo>
+                  <a:pt x="0" y="1200023"/>
                 </a:lnTo>
                 <a:lnTo>
                   <a:pt x="0" y="0"/>
@@ -24862,53 +25156,6 @@
               <a:alphaModFix/>
             </a:blip>
             <a:stretch>
-              <a:fillRect b="-188960" l="0" r="0" t="-188960"/>
-            </a:stretch>
-          </a:blipFill>
-          <a:ln>
-            <a:noFill/>
-          </a:ln>
-        </p:spPr>
-      </p:sp>
-      <p:sp>
-        <p:nvSpPr>
-          <p:cNvPr id="204" name="Google Shape;204;p8"/>
-          <p:cNvSpPr/>
-          <p:nvPr/>
-        </p:nvSpPr>
-        <p:spPr>
-          <a:xfrm>
-            <a:off x="17050470" y="98373"/>
-            <a:ext cx="1078897" cy="900017"/>
-          </a:xfrm>
-          <a:custGeom>
-            <a:rect b="b" l="l" r="r" t="t"/>
-            <a:pathLst>
-              <a:path extrusionOk="0" h="1200023" w="1438529">
-                <a:moveTo>
-                  <a:pt x="0" y="0"/>
-                </a:moveTo>
-                <a:lnTo>
-                  <a:pt x="1438529" y="0"/>
-                </a:lnTo>
-                <a:lnTo>
-                  <a:pt x="1438529" y="1200023"/>
-                </a:lnTo>
-                <a:lnTo>
-                  <a:pt x="0" y="1200023"/>
-                </a:lnTo>
-                <a:lnTo>
-                  <a:pt x="0" y="0"/>
-                </a:lnTo>
-                <a:close/>
-              </a:path>
-            </a:pathLst>
-          </a:custGeom>
-          <a:blipFill rotWithShape="1">
-            <a:blip r:embed="rId5">
-              <a:alphaModFix/>
-            </a:blip>
-            <a:stretch>
               <a:fillRect b="-163" l="0" r="0" t="-161"/>
             </a:stretch>
           </a:blipFill>
@@ -24919,7 +25166,7 @@
       </p:sp>
       <p:sp>
         <p:nvSpPr>
-          <p:cNvPr id="205" name="Google Shape;205;p8"/>
+          <p:cNvPr id="204" name="Google Shape;204;p8"/>
           <p:cNvSpPr txBox="1"/>
           <p:nvPr/>
         </p:nvSpPr>
@@ -24972,14 +25219,14 @@
       </p:sp>
       <p:sp>
         <p:nvSpPr>
-          <p:cNvPr id="206" name="Google Shape;206;p8"/>
+          <p:cNvPr id="205" name="Google Shape;205;p8"/>
           <p:cNvSpPr txBox="1"/>
           <p:nvPr/>
         </p:nvSpPr>
         <p:spPr>
           <a:xfrm>
             <a:off x="9163050" y="3394904"/>
-            <a:ext cx="8985351" cy="3306693"/>
+            <a:ext cx="8985300" cy="2920500"/>
           </a:xfrm>
           <a:prstGeom prst="rect">
             <a:avLst/>
@@ -25017,12 +25264,82 @@
                 <a:cs typeface="Calibri"/>
                 <a:sym typeface="Calibri"/>
               </a:rPr>
-              <a:t>Representa la estructura orientada a objetos del sistema, detallando entidades clave como Usuario (Administrador, JefeDeBodega, Chofer), Inventario, Cilindros, Reporte, AlertaStock, Pedido, Entrega, y clases de apoyo.</a:t>
+              <a:t>Representa la estructura orientada a objetos del sistema, detallando entidades clave como Usuario (Administrador, JefeDeBodega, Chofer), Inventario, Cilindro, Pe</a:t>
+            </a:r>
+            <a:r>
+              <a:rPr lang="en-US" sz="3250">
+                <a:latin typeface="Calibri"/>
+                <a:ea typeface="Calibri"/>
+                <a:cs typeface="Calibri"/>
+                <a:sym typeface="Calibri"/>
+              </a:rPr>
+              <a:t>rdida</a:t>
+            </a:r>
+            <a:r>
+              <a:rPr b="0" i="0" lang="en-US" sz="3250" u="none" cap="none" strike="noStrike">
+                <a:solidFill>
+                  <a:srgbClr val="000000"/>
+                </a:solidFill>
+                <a:latin typeface="Calibri"/>
+                <a:ea typeface="Calibri"/>
+                <a:cs typeface="Calibri"/>
+                <a:sym typeface="Calibri"/>
+              </a:rPr>
+              <a:t>, </a:t>
+            </a:r>
+            <a:r>
+              <a:rPr lang="en-US" sz="3250">
+                <a:latin typeface="Calibri"/>
+                <a:ea typeface="Calibri"/>
+                <a:cs typeface="Calibri"/>
+                <a:sym typeface="Calibri"/>
+              </a:rPr>
+              <a:t>Historial, Rol y ResetToken</a:t>
+            </a:r>
+            <a:r>
+              <a:rPr b="0" i="0" lang="en-US" sz="3250" u="none" cap="none" strike="noStrike">
+                <a:solidFill>
+                  <a:srgbClr val="000000"/>
+                </a:solidFill>
+                <a:latin typeface="Calibri"/>
+                <a:ea typeface="Calibri"/>
+                <a:cs typeface="Calibri"/>
+                <a:sym typeface="Calibri"/>
+              </a:rPr>
+              <a:t>.</a:t>
             </a:r>
             <a:endParaRPr/>
           </a:p>
         </p:txBody>
       </p:sp>
+      <p:pic>
+        <p:nvPicPr>
+          <p:cNvPr id="206" name="Google Shape;206;p8" title="DDC acotado a 13 cu.png"/>
+          <p:cNvPicPr preferRelativeResize="0"/>
+          <p:nvPr/>
+        </p:nvPicPr>
+        <p:blipFill>
+          <a:blip r:embed="rId5">
+            <a:alphaModFix/>
+          </a:blip>
+          <a:stretch>
+            <a:fillRect/>
+          </a:stretch>
+        </p:blipFill>
+        <p:spPr>
+          <a:xfrm>
+            <a:off x="410825" y="2091525"/>
+            <a:ext cx="8549575" cy="7013595"/>
+          </a:xfrm>
+          <a:prstGeom prst="rect">
+            <a:avLst/>
+          </a:prstGeom>
+          <a:noFill/>
+          <a:ln>
+            <a:noFill/>
+          </a:ln>
+        </p:spPr>
+      </p:pic>
     </p:spTree>
   </p:cSld>
   <p:clrMapOvr>
@@ -25331,6 +25648,285 @@
 </file>
 
 <file path=ppt/theme/theme1.xml><?xml version="1.0" encoding="utf-8"?>
+<a:theme xmlns:a="http://schemas.openxmlformats.org/drawingml/2006/main" xmlns:r="http://schemas.openxmlformats.org/officeDocument/2006/relationships" name="Office Theme">
+  <a:themeElements>
+    <a:clrScheme name="Office">
+      <a:dk1>
+        <a:srgbClr val="000000"/>
+      </a:dk1>
+      <a:lt1>
+        <a:srgbClr val="FFFFFF"/>
+      </a:lt1>
+      <a:dk2>
+        <a:srgbClr val="1F497D"/>
+      </a:dk2>
+      <a:lt2>
+        <a:srgbClr val="EEECE1"/>
+      </a:lt2>
+      <a:accent1>
+        <a:srgbClr val="4F81BD"/>
+      </a:accent1>
+      <a:accent2>
+        <a:srgbClr val="C0504D"/>
+      </a:accent2>
+      <a:accent3>
+        <a:srgbClr val="9BBB59"/>
+      </a:accent3>
+      <a:accent4>
+        <a:srgbClr val="8064A2"/>
+      </a:accent4>
+      <a:accent5>
+        <a:srgbClr val="4BACC6"/>
+      </a:accent5>
+      <a:accent6>
+        <a:srgbClr val="F79646"/>
+      </a:accent6>
+      <a:hlink>
+        <a:srgbClr val="0000FF"/>
+      </a:hlink>
+      <a:folHlink>
+        <a:srgbClr val="800080"/>
+      </a:folHlink>
+    </a:clrScheme>
+    <a:fontScheme name="Office">
+      <a:majorFont>
+        <a:latin typeface="Arial"/>
+        <a:ea typeface=""/>
+        <a:cs typeface=""/>
+        <a:font script="Jpan" typeface="ＭＳ Ｐゴシック"/>
+        <a:font script="Hang" typeface="맑은 고딕"/>
+        <a:font script="Hans" typeface="宋体"/>
+        <a:font script="Hant" typeface="新細明體"/>
+        <a:font script="Arab" typeface="Times New Roman"/>
+        <a:font script="Hebr" typeface="Times New Roman"/>
+        <a:font script="Thai" typeface="Angsana New"/>
+        <a:font script="Ethi" typeface="Nyala"/>
+        <a:font script="Beng" typeface="Vrinda"/>
+        <a:font script="Gujr" typeface="Shruti"/>
+        <a:font script="Khmr" typeface="MoolBoran"/>
+        <a:font script="Knda" typeface="Tunga"/>
+        <a:font script="Guru" typeface="Raavi"/>
+        <a:font script="Cans" typeface="Euphemia"/>
+        <a:font script="Cher" typeface="Plantagenet Cherokee"/>
+        <a:font script="Yiii" typeface="Microsoft Yi Baiti"/>
+        <a:font script="Tibt" typeface="Microsoft Himalaya"/>
+        <a:font script="Thaa" typeface="MV Boli"/>
+        <a:font script="Deva" typeface="Mangal"/>
+        <a:font script="Telu" typeface="Gautami"/>
+        <a:font script="Taml" typeface="Latha"/>
+        <a:font script="Syrc" typeface="Estrangelo Edessa"/>
+        <a:font script="Orya" typeface="Kalinga"/>
+        <a:font script="Mlym" typeface="Kartika"/>
+        <a:font script="Laoo" typeface="DokChampa"/>
+        <a:font script="Sinh" typeface="Iskoola Pota"/>
+        <a:font script="Mong" typeface="Mongolian Baiti"/>
+        <a:font script="Viet" typeface="Times New Roman"/>
+        <a:font script="Uigh" typeface="Microsoft Uighur"/>
+        <a:font script="Geor" typeface="Sylfaen"/>
+      </a:majorFont>
+      <a:minorFont>
+        <a:latin typeface="Arial"/>
+        <a:ea typeface=""/>
+        <a:cs typeface=""/>
+        <a:font script="Jpan" typeface="ＭＳ Ｐゴシック"/>
+        <a:font script="Hang" typeface="맑은 고딕"/>
+        <a:font script="Hans" typeface="宋体"/>
+        <a:font script="Hant" typeface="新細明體"/>
+        <a:font script="Arab" typeface="Arial"/>
+        <a:font script="Hebr" typeface="Arial"/>
+        <a:font script="Thai" typeface="Cordia New"/>
+        <a:font script="Ethi" typeface="Nyala"/>
+        <a:font script="Beng" typeface="Vrinda"/>
+        <a:font script="Gujr" typeface="Shruti"/>
+        <a:font script="Khmr" typeface="DaunPenh"/>
+        <a:font script="Knda" typeface="Tunga"/>
+        <a:font script="Guru" typeface="Raavi"/>
+        <a:font script="Cans" typeface="Euphemia"/>
+        <a:font script="Cher" typeface="Plantagenet Cherokee"/>
+        <a:font script="Yiii" typeface="Microsoft Yi Baiti"/>
+        <a:font script="Tibt" typeface="Microsoft Himalaya"/>
+        <a:font script="Thaa" typeface="MV Boli"/>
+        <a:font script="Deva" typeface="Mangal"/>
+        <a:font script="Telu" typeface="Gautami"/>
+        <a:font script="Taml" typeface="Latha"/>
+        <a:font script="Syrc" typeface="Estrangelo Edessa"/>
+        <a:font script="Orya" typeface="Kalinga"/>
+        <a:font script="Mlym" typeface="Kartika"/>
+        <a:font script="Laoo" typeface="DokChampa"/>
+        <a:font script="Sinh" typeface="Iskoola Pota"/>
+        <a:font script="Mong" typeface="Mongolian Baiti"/>
+        <a:font script="Viet" typeface="Arial"/>
+        <a:font script="Uigh" typeface="Microsoft Uighur"/>
+        <a:font script="Geor" typeface="Sylfaen"/>
+      </a:minorFont>
+    </a:fontScheme>
+    <a:fmtScheme name="Office">
+      <a:fillStyleLst>
+        <a:solidFill>
+          <a:schemeClr val="phClr"/>
+        </a:solidFill>
+        <a:gradFill rotWithShape="1">
+          <a:gsLst>
+            <a:gs pos="0">
+              <a:schemeClr val="phClr">
+                <a:tint val="50000"/>
+                <a:satMod val="300000"/>
+              </a:schemeClr>
+            </a:gs>
+            <a:gs pos="35000">
+              <a:schemeClr val="phClr">
+                <a:tint val="37000"/>
+                <a:satMod val="300000"/>
+              </a:schemeClr>
+            </a:gs>
+            <a:gs pos="100000">
+              <a:schemeClr val="phClr">
+                <a:tint val="15000"/>
+                <a:satMod val="350000"/>
+              </a:schemeClr>
+            </a:gs>
+          </a:gsLst>
+          <a:lin ang="16200000" scaled="1"/>
+        </a:gradFill>
+        <a:gradFill rotWithShape="1">
+          <a:gsLst>
+            <a:gs pos="0">
+              <a:schemeClr val="phClr">
+                <a:tint val="100000"/>
+                <a:shade val="100000"/>
+                <a:satMod val="130000"/>
+              </a:schemeClr>
+            </a:gs>
+            <a:gs pos="100000">
+              <a:schemeClr val="phClr">
+                <a:tint val="50000"/>
+                <a:shade val="100000"/>
+                <a:satMod val="350000"/>
+              </a:schemeClr>
+            </a:gs>
+          </a:gsLst>
+          <a:lin ang="16200000" scaled="0"/>
+        </a:gradFill>
+      </a:fillStyleLst>
+      <a:lnStyleLst>
+        <a:ln w="9525" cap="flat" cmpd="sng" algn="ctr">
+          <a:solidFill>
+            <a:schemeClr val="phClr">
+              <a:shade val="95000"/>
+              <a:satMod val="105000"/>
+            </a:schemeClr>
+          </a:solidFill>
+          <a:prstDash val="solid"/>
+        </a:ln>
+        <a:ln w="25400" cap="flat" cmpd="sng" algn="ctr">
+          <a:solidFill>
+            <a:schemeClr val="phClr"/>
+          </a:solidFill>
+          <a:prstDash val="solid"/>
+        </a:ln>
+        <a:ln w="38100" cap="flat" cmpd="sng" algn="ctr">
+          <a:solidFill>
+            <a:schemeClr val="phClr"/>
+          </a:solidFill>
+          <a:prstDash val="solid"/>
+        </a:ln>
+      </a:lnStyleLst>
+      <a:effectStyleLst>
+        <a:effectStyle>
+          <a:effectLst>
+            <a:outerShdw blurRad="40000" dist="20000" dir="5400000" rotWithShape="0">
+              <a:srgbClr val="000000">
+                <a:alpha val="38000"/>
+              </a:srgbClr>
+            </a:outerShdw>
+          </a:effectLst>
+        </a:effectStyle>
+        <a:effectStyle>
+          <a:effectLst>
+            <a:outerShdw blurRad="40000" dist="23000" dir="5400000" rotWithShape="0">
+              <a:srgbClr val="000000">
+                <a:alpha val="35000"/>
+              </a:srgbClr>
+            </a:outerShdw>
+          </a:effectLst>
+        </a:effectStyle>
+        <a:effectStyle>
+          <a:effectLst>
+            <a:outerShdw blurRad="40000" dist="23000" dir="5400000" rotWithShape="0">
+              <a:srgbClr val="000000">
+                <a:alpha val="35000"/>
+              </a:srgbClr>
+            </a:outerShdw>
+          </a:effectLst>
+          <a:scene3d>
+            <a:camera prst="orthographicFront">
+              <a:rot lat="0" lon="0" rev="0"/>
+            </a:camera>
+            <a:lightRig rig="threePt" dir="t">
+              <a:rot lat="0" lon="0" rev="1200000"/>
+            </a:lightRig>
+          </a:scene3d>
+          <a:sp3d>
+            <a:bevelT w="63500" h="25400"/>
+          </a:sp3d>
+        </a:effectStyle>
+      </a:effectStyleLst>
+      <a:bgFillStyleLst>
+        <a:solidFill>
+          <a:schemeClr val="phClr"/>
+        </a:solidFill>
+        <a:gradFill rotWithShape="1">
+          <a:gsLst>
+            <a:gs pos="0">
+              <a:schemeClr val="phClr">
+                <a:tint val="40000"/>
+                <a:satMod val="350000"/>
+              </a:schemeClr>
+            </a:gs>
+            <a:gs pos="40000">
+              <a:schemeClr val="phClr">
+                <a:tint val="45000"/>
+                <a:shade val="99000"/>
+                <a:satMod val="350000"/>
+              </a:schemeClr>
+            </a:gs>
+            <a:gs pos="100000">
+              <a:schemeClr val="phClr">
+                <a:shade val="20000"/>
+                <a:satMod val="255000"/>
+              </a:schemeClr>
+            </a:gs>
+          </a:gsLst>
+          <a:path path="circle">
+            <a:fillToRect l="50000" t="-80000" r="50000" b="180000"/>
+          </a:path>
+        </a:gradFill>
+        <a:gradFill rotWithShape="1">
+          <a:gsLst>
+            <a:gs pos="0">
+              <a:schemeClr val="phClr">
+                <a:tint val="80000"/>
+                <a:satMod val="300000"/>
+              </a:schemeClr>
+            </a:gs>
+            <a:gs pos="100000">
+              <a:schemeClr val="phClr">
+                <a:shade val="30000"/>
+                <a:satMod val="200000"/>
+              </a:schemeClr>
+            </a:gs>
+          </a:gsLst>
+          <a:path path="circle">
+            <a:fillToRect l="50000" t="50000" r="50000" b="50000"/>
+          </a:path>
+        </a:gradFill>
+      </a:bgFillStyleLst>
+    </a:fmtScheme>
+  </a:themeElements>
+</a:theme>
+</file>
+
+<file path=ppt/theme/theme2.xml><?xml version="1.0" encoding="utf-8"?>
 <a:theme xmlns:a="http://schemas.openxmlformats.org/drawingml/2006/main" xmlns:r="http://schemas.openxmlformats.org/officeDocument/2006/relationships">
   <a:themeElements>
     <a:clrScheme name="Default">
@@ -25607,283 +26203,4 @@
     </a:fmtScheme>
   </a:themeElements>
 </a:theme>
-</file>
-
-<file path=ppt/theme/theme2.xml><?xml version="1.0" encoding="utf-8"?>
-<a:theme xmlns:a="http://schemas.openxmlformats.org/drawingml/2006/main" xmlns:r="http://schemas.openxmlformats.org/officeDocument/2006/relationships" name="Office Theme">
-  <a:themeElements>
-    <a:clrScheme name="Office">
-      <a:dk1>
-        <a:srgbClr val="000000"/>
-      </a:dk1>
-      <a:lt1>
-        <a:srgbClr val="FFFFFF"/>
-      </a:lt1>
-      <a:dk2>
-        <a:srgbClr val="1F497D"/>
-      </a:dk2>
-      <a:lt2>
-        <a:srgbClr val="EEECE1"/>
-      </a:lt2>
-      <a:accent1>
-        <a:srgbClr val="4F81BD"/>
-      </a:accent1>
-      <a:accent2>
-        <a:srgbClr val="C0504D"/>
-      </a:accent2>
-      <a:accent3>
-        <a:srgbClr val="9BBB59"/>
-      </a:accent3>
-      <a:accent4>
-        <a:srgbClr val="8064A2"/>
-      </a:accent4>
-      <a:accent5>
-        <a:srgbClr val="4BACC6"/>
-      </a:accent5>
-      <a:accent6>
-        <a:srgbClr val="F79646"/>
-      </a:accent6>
-      <a:hlink>
-        <a:srgbClr val="0000FF"/>
-      </a:hlink>
-      <a:folHlink>
-        <a:srgbClr val="800080"/>
-      </a:folHlink>
-    </a:clrScheme>
-    <a:fontScheme name="Office">
-      <a:majorFont>
-        <a:latin typeface="Arial"/>
-        <a:ea typeface=""/>
-        <a:cs typeface=""/>
-        <a:font script="Jpan" typeface="ＭＳ Ｐゴシック"/>
-        <a:font script="Hang" typeface="맑은 고딕"/>
-        <a:font script="Hans" typeface="宋体"/>
-        <a:font script="Hant" typeface="新細明體"/>
-        <a:font script="Arab" typeface="Times New Roman"/>
-        <a:font script="Hebr" typeface="Times New Roman"/>
-        <a:font script="Thai" typeface="Angsana New"/>
-        <a:font script="Ethi" typeface="Nyala"/>
-        <a:font script="Beng" typeface="Vrinda"/>
-        <a:font script="Gujr" typeface="Shruti"/>
-        <a:font script="Khmr" typeface="MoolBoran"/>
-        <a:font script="Knda" typeface="Tunga"/>
-        <a:font script="Guru" typeface="Raavi"/>
-        <a:font script="Cans" typeface="Euphemia"/>
-        <a:font script="Cher" typeface="Plantagenet Cherokee"/>
-        <a:font script="Yiii" typeface="Microsoft Yi Baiti"/>
-        <a:font script="Tibt" typeface="Microsoft Himalaya"/>
-        <a:font script="Thaa" typeface="MV Boli"/>
-        <a:font script="Deva" typeface="Mangal"/>
-        <a:font script="Telu" typeface="Gautami"/>
-        <a:font script="Taml" typeface="Latha"/>
-        <a:font script="Syrc" typeface="Estrangelo Edessa"/>
-        <a:font script="Orya" typeface="Kalinga"/>
-        <a:font script="Mlym" typeface="Kartika"/>
-        <a:font script="Laoo" typeface="DokChampa"/>
-        <a:font script="Sinh" typeface="Iskoola Pota"/>
-        <a:font script="Mong" typeface="Mongolian Baiti"/>
-        <a:font script="Viet" typeface="Times New Roman"/>
-        <a:font script="Uigh" typeface="Microsoft Uighur"/>
-        <a:font script="Geor" typeface="Sylfaen"/>
-      </a:majorFont>
-      <a:minorFont>
-        <a:latin typeface="Arial"/>
-        <a:ea typeface=""/>
-        <a:cs typeface=""/>
-        <a:font script="Jpan" typeface="ＭＳ Ｐゴシック"/>
-        <a:font script="Hang" typeface="맑은 고딕"/>
-        <a:font script="Hans" typeface="宋体"/>
-        <a:font script="Hant" typeface="新細明體"/>
-        <a:font script="Arab" typeface="Arial"/>
-        <a:font script="Hebr" typeface="Arial"/>
-        <a:font script="Thai" typeface="Cordia New"/>
-        <a:font script="Ethi" typeface="Nyala"/>
-        <a:font script="Beng" typeface="Vrinda"/>
-        <a:font script="Gujr" typeface="Shruti"/>
-        <a:font script="Khmr" typeface="DaunPenh"/>
-        <a:font script="Knda" typeface="Tunga"/>
-        <a:font script="Guru" typeface="Raavi"/>
-        <a:font script="Cans" typeface="Euphemia"/>
-        <a:font script="Cher" typeface="Plantagenet Cherokee"/>
-        <a:font script="Yiii" typeface="Microsoft Yi Baiti"/>
-        <a:font script="Tibt" typeface="Microsoft Himalaya"/>
-        <a:font script="Thaa" typeface="MV Boli"/>
-        <a:font script="Deva" typeface="Mangal"/>
-        <a:font script="Telu" typeface="Gautami"/>
-        <a:font script="Taml" typeface="Latha"/>
-        <a:font script="Syrc" typeface="Estrangelo Edessa"/>
-        <a:font script="Orya" typeface="Kalinga"/>
-        <a:font script="Mlym" typeface="Kartika"/>
-        <a:font script="Laoo" typeface="DokChampa"/>
-        <a:font script="Sinh" typeface="Iskoola Pota"/>
-        <a:font script="Mong" typeface="Mongolian Baiti"/>
-        <a:font script="Viet" typeface="Arial"/>
-        <a:font script="Uigh" typeface="Microsoft Uighur"/>
-        <a:font script="Geor" typeface="Sylfaen"/>
-      </a:minorFont>
-    </a:fontScheme>
-    <a:fmtScheme name="Office">
-      <a:fillStyleLst>
-        <a:solidFill>
-          <a:schemeClr val="phClr"/>
-        </a:solidFill>
-        <a:gradFill rotWithShape="1">
-          <a:gsLst>
-            <a:gs pos="0">
-              <a:schemeClr val="phClr">
-                <a:tint val="50000"/>
-                <a:satMod val="300000"/>
-              </a:schemeClr>
-            </a:gs>
-            <a:gs pos="35000">
-              <a:schemeClr val="phClr">
-                <a:tint val="37000"/>
-                <a:satMod val="300000"/>
-              </a:schemeClr>
-            </a:gs>
-            <a:gs pos="100000">
-              <a:schemeClr val="phClr">
-                <a:tint val="15000"/>
-                <a:satMod val="350000"/>
-              </a:schemeClr>
-            </a:gs>
-          </a:gsLst>
-          <a:lin ang="16200000" scaled="1"/>
-        </a:gradFill>
-        <a:gradFill rotWithShape="1">
-          <a:gsLst>
-            <a:gs pos="0">
-              <a:schemeClr val="phClr">
-                <a:tint val="100000"/>
-                <a:shade val="100000"/>
-                <a:satMod val="130000"/>
-              </a:schemeClr>
-            </a:gs>
-            <a:gs pos="100000">
-              <a:schemeClr val="phClr">
-                <a:tint val="50000"/>
-                <a:shade val="100000"/>
-                <a:satMod val="350000"/>
-              </a:schemeClr>
-            </a:gs>
-          </a:gsLst>
-          <a:lin ang="16200000" scaled="0"/>
-        </a:gradFill>
-      </a:fillStyleLst>
-      <a:lnStyleLst>
-        <a:ln w="9525" cap="flat" cmpd="sng" algn="ctr">
-          <a:solidFill>
-            <a:schemeClr val="phClr">
-              <a:shade val="95000"/>
-              <a:satMod val="105000"/>
-            </a:schemeClr>
-          </a:solidFill>
-          <a:prstDash val="solid"/>
-        </a:ln>
-        <a:ln w="25400" cap="flat" cmpd="sng" algn="ctr">
-          <a:solidFill>
-            <a:schemeClr val="phClr"/>
-          </a:solidFill>
-          <a:prstDash val="solid"/>
-        </a:ln>
-        <a:ln w="38100" cap="flat" cmpd="sng" algn="ctr">
-          <a:solidFill>
-            <a:schemeClr val="phClr"/>
-          </a:solidFill>
-          <a:prstDash val="solid"/>
-        </a:ln>
-      </a:lnStyleLst>
-      <a:effectStyleLst>
-        <a:effectStyle>
-          <a:effectLst>
-            <a:outerShdw blurRad="40000" dist="20000" dir="5400000" rotWithShape="0">
-              <a:srgbClr val="000000">
-                <a:alpha val="38000"/>
-              </a:srgbClr>
-            </a:outerShdw>
-          </a:effectLst>
-        </a:effectStyle>
-        <a:effectStyle>
-          <a:effectLst>
-            <a:outerShdw blurRad="40000" dist="23000" dir="5400000" rotWithShape="0">
-              <a:srgbClr val="000000">
-                <a:alpha val="35000"/>
-              </a:srgbClr>
-            </a:outerShdw>
-          </a:effectLst>
-        </a:effectStyle>
-        <a:effectStyle>
-          <a:effectLst>
-            <a:outerShdw blurRad="40000" dist="23000" dir="5400000" rotWithShape="0">
-              <a:srgbClr val="000000">
-                <a:alpha val="35000"/>
-              </a:srgbClr>
-            </a:outerShdw>
-          </a:effectLst>
-          <a:scene3d>
-            <a:camera prst="orthographicFront">
-              <a:rot lat="0" lon="0" rev="0"/>
-            </a:camera>
-            <a:lightRig rig="threePt" dir="t">
-              <a:rot lat="0" lon="0" rev="1200000"/>
-            </a:lightRig>
-          </a:scene3d>
-          <a:sp3d>
-            <a:bevelT w="63500" h="25400"/>
-          </a:sp3d>
-        </a:effectStyle>
-      </a:effectStyleLst>
-      <a:bgFillStyleLst>
-        <a:solidFill>
-          <a:schemeClr val="phClr"/>
-        </a:solidFill>
-        <a:gradFill rotWithShape="1">
-          <a:gsLst>
-            <a:gs pos="0">
-              <a:schemeClr val="phClr">
-                <a:tint val="40000"/>
-                <a:satMod val="350000"/>
-              </a:schemeClr>
-            </a:gs>
-            <a:gs pos="40000">
-              <a:schemeClr val="phClr">
-                <a:tint val="45000"/>
-                <a:shade val="99000"/>
-                <a:satMod val="350000"/>
-              </a:schemeClr>
-            </a:gs>
-            <a:gs pos="100000">
-              <a:schemeClr val="phClr">
-                <a:shade val="20000"/>
-                <a:satMod val="255000"/>
-              </a:schemeClr>
-            </a:gs>
-          </a:gsLst>
-          <a:path path="circle">
-            <a:fillToRect l="50000" t="-80000" r="50000" b="180000"/>
-          </a:path>
-        </a:gradFill>
-        <a:gradFill rotWithShape="1">
-          <a:gsLst>
-            <a:gs pos="0">
-              <a:schemeClr val="phClr">
-                <a:tint val="80000"/>
-                <a:satMod val="300000"/>
-              </a:schemeClr>
-            </a:gs>
-            <a:gs pos="100000">
-              <a:schemeClr val="phClr">
-                <a:shade val="30000"/>
-                <a:satMod val="200000"/>
-              </a:schemeClr>
-            </a:gs>
-          </a:gsLst>
-          <a:path path="circle">
-            <a:fillToRect l="50000" t="50000" r="50000" b="50000"/>
-          </a:path>
-        </a:gradFill>
-      </a:bgFillStyleLst>
-    </a:fmtScheme>
-  </a:themeElements>
-</a:theme>
 </file>